--- a/.lessons/40 About some payment gateways packages/1.pptx
+++ b/.lessons/40 About some payment gateways packages/1.pptx
@@ -269,7 +269,7 @@
           <a:p>
             <a:fld id="{3E102D2E-813C-461C-9963-687A650C48C0}" type="datetimeFigureOut">
               <a:rPr lang="en-US" smtClean="0"/>
-              <a:t>7/8/2025</a:t>
+              <a:t>7/13/2025</a:t>
             </a:fld>
             <a:endParaRPr lang="en-US"/>
           </a:p>
@@ -467,7 +467,7 @@
           <a:p>
             <a:fld id="{3E102D2E-813C-461C-9963-687A650C48C0}" type="datetimeFigureOut">
               <a:rPr lang="en-US" smtClean="0"/>
-              <a:t>7/8/2025</a:t>
+              <a:t>7/13/2025</a:t>
             </a:fld>
             <a:endParaRPr lang="en-US"/>
           </a:p>
@@ -675,7 +675,7 @@
           <a:p>
             <a:fld id="{3E102D2E-813C-461C-9963-687A650C48C0}" type="datetimeFigureOut">
               <a:rPr lang="en-US" smtClean="0"/>
-              <a:t>7/8/2025</a:t>
+              <a:t>7/13/2025</a:t>
             </a:fld>
             <a:endParaRPr lang="en-US"/>
           </a:p>
@@ -873,7 +873,7 @@
           <a:p>
             <a:fld id="{3E102D2E-813C-461C-9963-687A650C48C0}" type="datetimeFigureOut">
               <a:rPr lang="en-US" smtClean="0"/>
-              <a:t>7/8/2025</a:t>
+              <a:t>7/13/2025</a:t>
             </a:fld>
             <a:endParaRPr lang="en-US"/>
           </a:p>
@@ -1148,7 +1148,7 @@
           <a:p>
             <a:fld id="{3E102D2E-813C-461C-9963-687A650C48C0}" type="datetimeFigureOut">
               <a:rPr lang="en-US" smtClean="0"/>
-              <a:t>7/8/2025</a:t>
+              <a:t>7/13/2025</a:t>
             </a:fld>
             <a:endParaRPr lang="en-US"/>
           </a:p>
@@ -1413,7 +1413,7 @@
           <a:p>
             <a:fld id="{3E102D2E-813C-461C-9963-687A650C48C0}" type="datetimeFigureOut">
               <a:rPr lang="en-US" smtClean="0"/>
-              <a:t>7/8/2025</a:t>
+              <a:t>7/13/2025</a:t>
             </a:fld>
             <a:endParaRPr lang="en-US"/>
           </a:p>
@@ -1825,7 +1825,7 @@
           <a:p>
             <a:fld id="{3E102D2E-813C-461C-9963-687A650C48C0}" type="datetimeFigureOut">
               <a:rPr lang="en-US" smtClean="0"/>
-              <a:t>7/8/2025</a:t>
+              <a:t>7/13/2025</a:t>
             </a:fld>
             <a:endParaRPr lang="en-US"/>
           </a:p>
@@ -1966,7 +1966,7 @@
           <a:p>
             <a:fld id="{3E102D2E-813C-461C-9963-687A650C48C0}" type="datetimeFigureOut">
               <a:rPr lang="en-US" smtClean="0"/>
-              <a:t>7/8/2025</a:t>
+              <a:t>7/13/2025</a:t>
             </a:fld>
             <a:endParaRPr lang="en-US"/>
           </a:p>
@@ -2079,7 +2079,7 @@
           <a:p>
             <a:fld id="{3E102D2E-813C-461C-9963-687A650C48C0}" type="datetimeFigureOut">
               <a:rPr lang="en-US" smtClean="0"/>
-              <a:t>7/8/2025</a:t>
+              <a:t>7/13/2025</a:t>
             </a:fld>
             <a:endParaRPr lang="en-US"/>
           </a:p>
@@ -2390,7 +2390,7 @@
           <a:p>
             <a:fld id="{3E102D2E-813C-461C-9963-687A650C48C0}" type="datetimeFigureOut">
               <a:rPr lang="en-US" smtClean="0"/>
-              <a:t>7/8/2025</a:t>
+              <a:t>7/13/2025</a:t>
             </a:fld>
             <a:endParaRPr lang="en-US"/>
           </a:p>
@@ -2678,7 +2678,7 @@
           <a:p>
             <a:fld id="{3E102D2E-813C-461C-9963-687A650C48C0}" type="datetimeFigureOut">
               <a:rPr lang="en-US" smtClean="0"/>
-              <a:t>7/8/2025</a:t>
+              <a:t>7/13/2025</a:t>
             </a:fld>
             <a:endParaRPr lang="en-US"/>
           </a:p>
@@ -2919,7 +2919,7 @@
           <a:p>
             <a:fld id="{3E102D2E-813C-461C-9963-687A650C48C0}" type="datetimeFigureOut">
               <a:rPr lang="en-US" smtClean="0"/>
-              <a:t>7/8/2025</a:t>
+              <a:t>7/13/2025</a:t>
             </a:fld>
             <a:endParaRPr lang="en-US"/>
           </a:p>
@@ -4014,7 +4014,7 @@
         </p:nvSpPr>
         <p:spPr>
           <a:xfrm>
-            <a:off x="217714" y="255046"/>
+            <a:off x="217714" y="250501"/>
             <a:ext cx="11756571" cy="6356997"/>
           </a:xfrm>
           <a:prstGeom prst="rect">
